--- a/과제/파이썬프로그래밍_2022158067_김지우_1-9과제(12주차_11장).pptx
+++ b/과제/파이썬프로그래밍_2022158067_김지우_1-9과제(12주차_11장).pptx
@@ -5950,10 +5950,10 @@
       </p:pic>
       <p:grpSp>
         <p:nvGrpSpPr>
-          <p:cNvPr id="64" name="그룹 63">
-            <a:extLst>
-              <a:ext uri="{FF2B5EF4-FFF2-40B4-BE49-F238E27FC236}">
-                <a16:creationId xmlns:a16="http://schemas.microsoft.com/office/drawing/2014/main" id="{22607C53-C784-42FB-B211-E94FB51D9568}"/>
+          <p:cNvPr id="66" name="그룹 65">
+            <a:extLst>
+              <a:ext uri="{FF2B5EF4-FFF2-40B4-BE49-F238E27FC236}">
+                <a16:creationId xmlns:a16="http://schemas.microsoft.com/office/drawing/2014/main" id="{FEE73DB0-A8D1-A5C4-13F9-9E23AB3314D2}"/>
               </a:ext>
             </a:extLst>
           </p:cNvPr>
@@ -5964,251 +5964,324 @@
           <a:xfrm>
             <a:off x="386247" y="1292575"/>
             <a:ext cx="5350862" cy="5207914"/>
-            <a:chOff x="386247" y="1374436"/>
+            <a:chOff x="386247" y="1292575"/>
             <a:chExt cx="5350862" cy="5207914"/>
           </a:xfrm>
         </p:grpSpPr>
-        <p:pic>
-          <p:nvPicPr>
-            <p:cNvPr id="62" name="그림 61">
+        <p:grpSp>
+          <p:nvGrpSpPr>
+            <p:cNvPr id="64" name="그룹 63">
               <a:extLst>
                 <a:ext uri="{FF2B5EF4-FFF2-40B4-BE49-F238E27FC236}">
-                  <a16:creationId xmlns:a16="http://schemas.microsoft.com/office/drawing/2014/main" id="{DF9E0D5A-96A1-782E-CB11-F10ADE7BB5DC}"/>
+                  <a16:creationId xmlns:a16="http://schemas.microsoft.com/office/drawing/2014/main" id="{22607C53-C784-42FB-B211-E94FB51D9568}"/>
                 </a:ext>
               </a:extLst>
             </p:cNvPr>
-            <p:cNvPicPr>
-              <a:picLocks noChangeAspect="1"/>
-            </p:cNvPicPr>
+            <p:cNvGrpSpPr/>
             <p:nvPr/>
-          </p:nvPicPr>
-          <p:blipFill>
-            <a:blip r:embed="rId3"/>
-            <a:srcRect l="55274"/>
-            <a:stretch/>
-          </p:blipFill>
-          <p:spPr>
-            <a:xfrm rot="16200000">
-              <a:off x="1566767" y="4451412"/>
-              <a:ext cx="945158" cy="3306197"/>
+          </p:nvGrpSpPr>
+          <p:grpSpPr>
+            <a:xfrm>
+              <a:off x="386247" y="1292575"/>
+              <a:ext cx="5350862" cy="5207914"/>
+              <a:chOff x="386247" y="1374436"/>
+              <a:chExt cx="5350862" cy="5207914"/>
             </a:xfrm>
-            <a:prstGeom prst="rect">
-              <a:avLst/>
-            </a:prstGeom>
-          </p:spPr>
-        </p:pic>
-        <p:pic>
-          <p:nvPicPr>
-            <p:cNvPr id="61" name="그림 60">
+          </p:grpSpPr>
+          <p:pic>
+            <p:nvPicPr>
+              <p:cNvPr id="62" name="그림 61">
+                <a:extLst>
+                  <a:ext uri="{FF2B5EF4-FFF2-40B4-BE49-F238E27FC236}">
+                    <a16:creationId xmlns:a16="http://schemas.microsoft.com/office/drawing/2014/main" id="{DF9E0D5A-96A1-782E-CB11-F10ADE7BB5DC}"/>
+                  </a:ext>
+                </a:extLst>
+              </p:cNvPr>
+              <p:cNvPicPr>
+                <a:picLocks noChangeAspect="1"/>
+              </p:cNvPicPr>
+              <p:nvPr/>
+            </p:nvPicPr>
+            <p:blipFill>
+              <a:blip r:embed="rId3"/>
+              <a:srcRect l="55274"/>
+              <a:stretch/>
+            </p:blipFill>
+            <p:spPr>
+              <a:xfrm rot="16200000">
+                <a:off x="1566767" y="4451412"/>
+                <a:ext cx="945158" cy="3306197"/>
+              </a:xfrm>
+              <a:prstGeom prst="rect">
+                <a:avLst/>
+              </a:prstGeom>
+            </p:spPr>
+          </p:pic>
+          <p:pic>
+            <p:nvPicPr>
+              <p:cNvPr id="61" name="그림 60">
+                <a:extLst>
+                  <a:ext uri="{FF2B5EF4-FFF2-40B4-BE49-F238E27FC236}">
+                    <a16:creationId xmlns:a16="http://schemas.microsoft.com/office/drawing/2014/main" id="{B860350E-2BEA-CF44-2020-E59BD0DAD72F}"/>
+                  </a:ext>
+                </a:extLst>
+              </p:cNvPr>
+              <p:cNvPicPr>
+                <a:picLocks noChangeAspect="1"/>
+              </p:cNvPicPr>
+              <p:nvPr/>
+            </p:nvPicPr>
+            <p:blipFill>
+              <a:blip r:embed="rId3"/>
+              <a:srcRect l="55274"/>
+              <a:stretch/>
+            </p:blipFill>
+            <p:spPr>
+              <a:xfrm>
+                <a:off x="2833376" y="3051512"/>
+                <a:ext cx="945158" cy="3306197"/>
+              </a:xfrm>
+              <a:prstGeom prst="rect">
+                <a:avLst/>
+              </a:prstGeom>
+            </p:spPr>
+          </p:pic>
+          <p:pic>
+            <p:nvPicPr>
+              <p:cNvPr id="60" name="그림 59">
+                <a:extLst>
+                  <a:ext uri="{FF2B5EF4-FFF2-40B4-BE49-F238E27FC236}">
+                    <a16:creationId xmlns:a16="http://schemas.microsoft.com/office/drawing/2014/main" id="{1C9A3876-D8D4-14ED-D40D-91504296F6E0}"/>
+                  </a:ext>
+                </a:extLst>
+              </p:cNvPr>
+              <p:cNvPicPr>
+                <a:picLocks noChangeAspect="1"/>
+              </p:cNvPicPr>
+              <p:nvPr/>
+            </p:nvPicPr>
+            <p:blipFill>
+              <a:blip r:embed="rId3"/>
+              <a:srcRect l="55274"/>
+              <a:stretch/>
+            </p:blipFill>
+            <p:spPr>
+              <a:xfrm>
+                <a:off x="4791951" y="1382697"/>
+                <a:ext cx="945158" cy="3306197"/>
+              </a:xfrm>
+              <a:prstGeom prst="rect">
+                <a:avLst/>
+              </a:prstGeom>
+            </p:spPr>
+          </p:pic>
+          <p:pic>
+            <p:nvPicPr>
+              <p:cNvPr id="59" name="그림 58">
+                <a:extLst>
+                  <a:ext uri="{FF2B5EF4-FFF2-40B4-BE49-F238E27FC236}">
+                    <a16:creationId xmlns:a16="http://schemas.microsoft.com/office/drawing/2014/main" id="{30627DE7-F9B9-A3DF-A687-33B309EDD651}"/>
+                  </a:ext>
+                </a:extLst>
+              </p:cNvPr>
+              <p:cNvPicPr>
+                <a:picLocks noChangeAspect="1"/>
+              </p:cNvPicPr>
+              <p:nvPr/>
+            </p:nvPicPr>
+            <p:blipFill>
+              <a:blip r:embed="rId3"/>
+              <a:srcRect l="55274"/>
+              <a:stretch/>
+            </p:blipFill>
+            <p:spPr>
+              <a:xfrm>
+                <a:off x="2452602" y="1382698"/>
+                <a:ext cx="945158" cy="3306197"/>
+              </a:xfrm>
+              <a:prstGeom prst="rect">
+                <a:avLst/>
+              </a:prstGeom>
+            </p:spPr>
+          </p:pic>
+          <p:pic>
+            <p:nvPicPr>
+              <p:cNvPr id="53" name="그림 52">
+                <a:extLst>
+                  <a:ext uri="{FF2B5EF4-FFF2-40B4-BE49-F238E27FC236}">
+                    <a16:creationId xmlns:a16="http://schemas.microsoft.com/office/drawing/2014/main" id="{B209EE66-54AD-C5E2-F443-9C91C6ABEE24}"/>
+                  </a:ext>
+                </a:extLst>
+              </p:cNvPr>
+              <p:cNvPicPr>
+                <a:picLocks noChangeAspect="1"/>
+              </p:cNvPicPr>
+              <p:nvPr/>
+            </p:nvPicPr>
+            <p:blipFill>
+              <a:blip r:embed="rId4"/>
+              <a:stretch>
+                <a:fillRect/>
+              </a:stretch>
+            </p:blipFill>
+            <p:spPr>
+              <a:xfrm>
+                <a:off x="386248" y="4319387"/>
+                <a:ext cx="2880445" cy="2038322"/>
+              </a:xfrm>
+              <a:prstGeom prst="rect">
+                <a:avLst/>
+              </a:prstGeom>
+            </p:spPr>
+          </p:pic>
+          <p:pic>
+            <p:nvPicPr>
+              <p:cNvPr id="55" name="그림 54">
+                <a:extLst>
+                  <a:ext uri="{FF2B5EF4-FFF2-40B4-BE49-F238E27FC236}">
+                    <a16:creationId xmlns:a16="http://schemas.microsoft.com/office/drawing/2014/main" id="{F3156B80-84A1-4477-661C-6E89B02E3DFB}"/>
+                  </a:ext>
+                </a:extLst>
+              </p:cNvPr>
+              <p:cNvPicPr>
+                <a:picLocks noChangeAspect="1"/>
+              </p:cNvPicPr>
+              <p:nvPr/>
+            </p:nvPicPr>
+            <p:blipFill>
+              <a:blip r:embed="rId5"/>
+              <a:stretch>
+                <a:fillRect/>
+              </a:stretch>
+            </p:blipFill>
+            <p:spPr>
+              <a:xfrm>
+                <a:off x="3397760" y="1382698"/>
+                <a:ext cx="2063405" cy="2169293"/>
+              </a:xfrm>
+              <a:prstGeom prst="rect">
+                <a:avLst/>
+              </a:prstGeom>
+            </p:spPr>
+          </p:pic>
+          <p:pic>
+            <p:nvPicPr>
+              <p:cNvPr id="57" name="그림 56">
+                <a:extLst>
+                  <a:ext uri="{FF2B5EF4-FFF2-40B4-BE49-F238E27FC236}">
+                    <a16:creationId xmlns:a16="http://schemas.microsoft.com/office/drawing/2014/main" id="{63C76446-2F23-A391-2E1A-0A5F133516EE}"/>
+                  </a:ext>
+                </a:extLst>
+              </p:cNvPr>
+              <p:cNvPicPr>
+                <a:picLocks noChangeAspect="1"/>
+              </p:cNvPicPr>
+              <p:nvPr/>
+            </p:nvPicPr>
+            <p:blipFill>
+              <a:blip r:embed="rId6"/>
+              <a:stretch>
+                <a:fillRect/>
+              </a:stretch>
+            </p:blipFill>
+            <p:spPr>
+              <a:xfrm>
+                <a:off x="3382520" y="3550546"/>
+                <a:ext cx="2354589" cy="3028263"/>
+              </a:xfrm>
+              <a:prstGeom prst="rect">
+                <a:avLst/>
+              </a:prstGeom>
+            </p:spPr>
+          </p:pic>
+          <p:pic>
+            <p:nvPicPr>
+              <p:cNvPr id="51" name="그림 50">
+                <a:extLst>
+                  <a:ext uri="{FF2B5EF4-FFF2-40B4-BE49-F238E27FC236}">
+                    <a16:creationId xmlns:a16="http://schemas.microsoft.com/office/drawing/2014/main" id="{7DE2A8F3-25FF-7326-8A2C-6C2D104F82B9}"/>
+                  </a:ext>
+                </a:extLst>
+              </p:cNvPr>
+              <p:cNvPicPr>
+                <a:picLocks noChangeAspect="1"/>
+              </p:cNvPicPr>
+              <p:nvPr/>
+            </p:nvPicPr>
+            <p:blipFill>
+              <a:blip r:embed="rId7"/>
+              <a:srcRect/>
+              <a:stretch/>
+            </p:blipFill>
+            <p:spPr>
+              <a:xfrm>
+                <a:off x="386248" y="1382698"/>
+                <a:ext cx="2396289" cy="2936689"/>
+              </a:xfrm>
+              <a:prstGeom prst="rect">
+                <a:avLst/>
+              </a:prstGeom>
+            </p:spPr>
+          </p:pic>
+          <p:sp>
+            <p:nvSpPr>
+              <p:cNvPr id="63" name="직사각형 62">
+                <a:extLst>
+                  <a:ext uri="{FF2B5EF4-FFF2-40B4-BE49-F238E27FC236}">
+                    <a16:creationId xmlns:a16="http://schemas.microsoft.com/office/drawing/2014/main" id="{DEB4AEE3-F5F0-B4D7-F634-CB0AD5517DE7}"/>
+                  </a:ext>
+                </a:extLst>
+              </p:cNvPr>
+              <p:cNvSpPr/>
+              <p:nvPr/>
+            </p:nvSpPr>
+            <p:spPr>
+              <a:xfrm>
+                <a:off x="386247" y="1374436"/>
+                <a:ext cx="5350862" cy="5207914"/>
+              </a:xfrm>
+              <a:prstGeom prst="rect">
+                <a:avLst/>
+              </a:prstGeom>
+              <a:noFill/>
+              <a:ln w="28575">
+                <a:solidFill>
+                  <a:srgbClr val="FF0000"/>
+                </a:solidFill>
+              </a:ln>
+            </p:spPr>
+            <p:style>
+              <a:lnRef idx="2">
+                <a:schemeClr val="accent1">
+                  <a:shade val="15000"/>
+                </a:schemeClr>
+              </a:lnRef>
+              <a:fillRef idx="1">
+                <a:schemeClr val="accent1"/>
+              </a:fillRef>
+              <a:effectRef idx="0">
+                <a:schemeClr val="accent1"/>
+              </a:effectRef>
+              <a:fontRef idx="minor">
+                <a:schemeClr val="lt1"/>
+              </a:fontRef>
+            </p:style>
+            <p:txBody>
+              <a:bodyPr rtlCol="0" anchor="ctr"/>
+              <a:lstStyle/>
+              <a:p>
+                <a:pPr algn="ctr"/>
+                <a:endParaRPr lang="ko-KR" altLang="en-US"/>
+              </a:p>
+            </p:txBody>
+          </p:sp>
+        </p:grpSp>
+        <p:sp>
+          <p:nvSpPr>
+            <p:cNvPr id="65" name="직사각형 64">
               <a:extLst>
                 <a:ext uri="{FF2B5EF4-FFF2-40B4-BE49-F238E27FC236}">
-                  <a16:creationId xmlns:a16="http://schemas.microsoft.com/office/drawing/2014/main" id="{B860350E-2BEA-CF44-2020-E59BD0DAD72F}"/>
-                </a:ext>
-              </a:extLst>
-            </p:cNvPr>
-            <p:cNvPicPr>
-              <a:picLocks noChangeAspect="1"/>
-            </p:cNvPicPr>
-            <p:nvPr/>
-          </p:nvPicPr>
-          <p:blipFill>
-            <a:blip r:embed="rId3"/>
-            <a:srcRect l="55274"/>
-            <a:stretch/>
-          </p:blipFill>
-          <p:spPr>
-            <a:xfrm>
-              <a:off x="2833376" y="3051512"/>
-              <a:ext cx="945158" cy="3306197"/>
-            </a:xfrm>
-            <a:prstGeom prst="rect">
-              <a:avLst/>
-            </a:prstGeom>
-          </p:spPr>
-        </p:pic>
-        <p:pic>
-          <p:nvPicPr>
-            <p:cNvPr id="60" name="그림 59">
-              <a:extLst>
-                <a:ext uri="{FF2B5EF4-FFF2-40B4-BE49-F238E27FC236}">
-                  <a16:creationId xmlns:a16="http://schemas.microsoft.com/office/drawing/2014/main" id="{1C9A3876-D8D4-14ED-D40D-91504296F6E0}"/>
-                </a:ext>
-              </a:extLst>
-            </p:cNvPr>
-            <p:cNvPicPr>
-              <a:picLocks noChangeAspect="1"/>
-            </p:cNvPicPr>
-            <p:nvPr/>
-          </p:nvPicPr>
-          <p:blipFill>
-            <a:blip r:embed="rId3"/>
-            <a:srcRect l="55274"/>
-            <a:stretch/>
-          </p:blipFill>
-          <p:spPr>
-            <a:xfrm>
-              <a:off x="4791951" y="1382697"/>
-              <a:ext cx="945158" cy="3306197"/>
-            </a:xfrm>
-            <a:prstGeom prst="rect">
-              <a:avLst/>
-            </a:prstGeom>
-          </p:spPr>
-        </p:pic>
-        <p:pic>
-          <p:nvPicPr>
-            <p:cNvPr id="59" name="그림 58">
-              <a:extLst>
-                <a:ext uri="{FF2B5EF4-FFF2-40B4-BE49-F238E27FC236}">
-                  <a16:creationId xmlns:a16="http://schemas.microsoft.com/office/drawing/2014/main" id="{30627DE7-F9B9-A3DF-A687-33B309EDD651}"/>
-                </a:ext>
-              </a:extLst>
-            </p:cNvPr>
-            <p:cNvPicPr>
-              <a:picLocks noChangeAspect="1"/>
-            </p:cNvPicPr>
-            <p:nvPr/>
-          </p:nvPicPr>
-          <p:blipFill>
-            <a:blip r:embed="rId3"/>
-            <a:srcRect l="55274"/>
-            <a:stretch/>
-          </p:blipFill>
-          <p:spPr>
-            <a:xfrm>
-              <a:off x="2452602" y="1382698"/>
-              <a:ext cx="945158" cy="3306197"/>
-            </a:xfrm>
-            <a:prstGeom prst="rect">
-              <a:avLst/>
-            </a:prstGeom>
-          </p:spPr>
-        </p:pic>
-        <p:pic>
-          <p:nvPicPr>
-            <p:cNvPr id="53" name="그림 52">
-              <a:extLst>
-                <a:ext uri="{FF2B5EF4-FFF2-40B4-BE49-F238E27FC236}">
-                  <a16:creationId xmlns:a16="http://schemas.microsoft.com/office/drawing/2014/main" id="{B209EE66-54AD-C5E2-F443-9C91C6ABEE24}"/>
-                </a:ext>
-              </a:extLst>
-            </p:cNvPr>
-            <p:cNvPicPr>
-              <a:picLocks noChangeAspect="1"/>
-            </p:cNvPicPr>
-            <p:nvPr/>
-          </p:nvPicPr>
-          <p:blipFill>
-            <a:blip r:embed="rId4"/>
-            <a:stretch>
-              <a:fillRect/>
-            </a:stretch>
-          </p:blipFill>
-          <p:spPr>
-            <a:xfrm>
-              <a:off x="386248" y="4319387"/>
-              <a:ext cx="2880445" cy="2038322"/>
-            </a:xfrm>
-            <a:prstGeom prst="rect">
-              <a:avLst/>
-            </a:prstGeom>
-          </p:spPr>
-        </p:pic>
-        <p:pic>
-          <p:nvPicPr>
-            <p:cNvPr id="55" name="그림 54">
-              <a:extLst>
-                <a:ext uri="{FF2B5EF4-FFF2-40B4-BE49-F238E27FC236}">
-                  <a16:creationId xmlns:a16="http://schemas.microsoft.com/office/drawing/2014/main" id="{F3156B80-84A1-4477-661C-6E89B02E3DFB}"/>
-                </a:ext>
-              </a:extLst>
-            </p:cNvPr>
-            <p:cNvPicPr>
-              <a:picLocks noChangeAspect="1"/>
-            </p:cNvPicPr>
-            <p:nvPr/>
-          </p:nvPicPr>
-          <p:blipFill>
-            <a:blip r:embed="rId5"/>
-            <a:stretch>
-              <a:fillRect/>
-            </a:stretch>
-          </p:blipFill>
-          <p:spPr>
-            <a:xfrm>
-              <a:off x="3397760" y="1382698"/>
-              <a:ext cx="2063405" cy="2169293"/>
-            </a:xfrm>
-            <a:prstGeom prst="rect">
-              <a:avLst/>
-            </a:prstGeom>
-          </p:spPr>
-        </p:pic>
-        <p:pic>
-          <p:nvPicPr>
-            <p:cNvPr id="57" name="그림 56">
-              <a:extLst>
-                <a:ext uri="{FF2B5EF4-FFF2-40B4-BE49-F238E27FC236}">
-                  <a16:creationId xmlns:a16="http://schemas.microsoft.com/office/drawing/2014/main" id="{63C76446-2F23-A391-2E1A-0A5F133516EE}"/>
-                </a:ext>
-              </a:extLst>
-            </p:cNvPr>
-            <p:cNvPicPr>
-              <a:picLocks noChangeAspect="1"/>
-            </p:cNvPicPr>
-            <p:nvPr/>
-          </p:nvPicPr>
-          <p:blipFill>
-            <a:blip r:embed="rId6"/>
-            <a:stretch>
-              <a:fillRect/>
-            </a:stretch>
-          </p:blipFill>
-          <p:spPr>
-            <a:xfrm>
-              <a:off x="3382520" y="3550546"/>
-              <a:ext cx="2354589" cy="3028263"/>
-            </a:xfrm>
-            <a:prstGeom prst="rect">
-              <a:avLst/>
-            </a:prstGeom>
-          </p:spPr>
-        </p:pic>
-        <p:pic>
-          <p:nvPicPr>
-            <p:cNvPr id="51" name="그림 50">
-              <a:extLst>
-                <a:ext uri="{FF2B5EF4-FFF2-40B4-BE49-F238E27FC236}">
-                  <a16:creationId xmlns:a16="http://schemas.microsoft.com/office/drawing/2014/main" id="{7DE2A8F3-25FF-7326-8A2C-6C2D104F82B9}"/>
-                </a:ext>
-              </a:extLst>
-            </p:cNvPr>
-            <p:cNvPicPr>
-              <a:picLocks noChangeAspect="1"/>
-            </p:cNvPicPr>
-            <p:nvPr/>
-          </p:nvPicPr>
-          <p:blipFill>
-            <a:blip r:embed="rId7"/>
-            <a:srcRect/>
-            <a:stretch/>
-          </p:blipFill>
-          <p:spPr>
-            <a:xfrm>
-              <a:off x="386248" y="1382698"/>
-              <a:ext cx="2396289" cy="2936689"/>
-            </a:xfrm>
-            <a:prstGeom prst="rect">
-              <a:avLst/>
-            </a:prstGeom>
-          </p:spPr>
-        </p:pic>
-        <p:sp>
-          <p:nvSpPr>
-            <p:cNvPr id="63" name="직사각형 62">
-              <a:extLst>
-                <a:ext uri="{FF2B5EF4-FFF2-40B4-BE49-F238E27FC236}">
-                  <a16:creationId xmlns:a16="http://schemas.microsoft.com/office/drawing/2014/main" id="{DEB4AEE3-F5F0-B4D7-F634-CB0AD5517DE7}"/>
+                  <a16:creationId xmlns:a16="http://schemas.microsoft.com/office/drawing/2014/main" id="{88A55659-2D55-F5E0-70C0-C85E76995ADA}"/>
                 </a:ext>
               </a:extLst>
             </p:cNvPr>
@@ -6217,8 +6290,8 @@
           </p:nvSpPr>
           <p:spPr>
             <a:xfrm>
-              <a:off x="386247" y="1374436"/>
-              <a:ext cx="5350862" cy="5207914"/>
+              <a:off x="395546" y="1292575"/>
+              <a:ext cx="2951375" cy="5207914"/>
             </a:xfrm>
             <a:prstGeom prst="rect">
               <a:avLst/>
